--- a/presentations/PR_L13_QueryDesk_Lesson.pptx
+++ b/presentations/PR_L13_QueryDesk_Lesson.pptx
@@ -2617,7 +2617,7 @@
                 <a:ea typeface="IBM Plex Sans" pitchFamily="34" charset="-122"/>
                 <a:cs typeface="IBM Plex Sans" pitchFamily="34" charset="-120"/>
               </a:rPr>
-              <a:t>Mistake: mixing up the quotes, so a word is read as a field name and the query finds nothing.</a:t>
+              <a:t>Common mistake: mixing up the quotes, so a word is read as a field name and the query finds nothing.</a:t>
             </a:r>
             <a:endParaRPr lang="en-US" sz="1700" dirty="0"/>
           </a:p>
@@ -7971,7 +7971,7 @@
                 <a:ea typeface="IBM Plex Sans" pitchFamily="34" charset="-122"/>
                 <a:cs typeface="IBM Plex Sans" pitchFamily="34" charset="-120"/>
               </a:rPr>
-              <a:t>Mistake: listing the fields in the wrong order, since results come out in the order you asked for.</a:t>
+              <a:t>Common mistake: listing the fields in the wrong order, since results come out in the order you asked for.</a:t>
             </a:r>
             <a:endParaRPr lang="en-US" sz="1700" dirty="0"/>
           </a:p>
@@ -8547,7 +8547,7 @@
                 <a:ea typeface="IBM Plex Sans" pitchFamily="34" charset="-122"/>
                 <a:cs typeface="IBM Plex Sans" pitchFamily="34" charset="-120"/>
               </a:rPr>
-              <a:t>Mistake: leaving the quotes off text, so SQL looks for a field with that name instead.</a:t>
+              <a:t>Common mistake: leaving the quotes off text, so SQL looks for a field with that name instead.</a:t>
             </a:r>
             <a:endParaRPr lang="en-US" sz="1700" dirty="0"/>
           </a:p>
@@ -9123,7 +9123,7 @@
                 <a:ea typeface="IBM Plex Sans" pitchFamily="34" charset="-122"/>
                 <a:cs typeface="IBM Plex Sans" pitchFamily="34" charset="-120"/>
               </a:rPr>
-              <a:t>Mistake: using &gt; where the question says 'or more', which loses the boundary record.</a:t>
+              <a:t>Common mistake: using &gt; where the question says 'or more', which loses the boundary record.</a:t>
             </a:r>
             <a:endParaRPr lang="en-US" sz="1700" dirty="0"/>
           </a:p>
@@ -9699,7 +9699,7 @@
                 <a:ea typeface="IBM Plex Sans" pitchFamily="34" charset="-122"/>
                 <a:cs typeface="IBM Plex Sans" pitchFamily="34" charset="-120"/>
               </a:rPr>
-              <a:t>Mistake: using AND where the question means OR, which often gives no records at all.</a:t>
+              <a:t>Common mistake: using AND where the question means OR, which often gives no records at all.</a:t>
             </a:r>
             <a:endParaRPr lang="en-US" sz="1700" dirty="0"/>
           </a:p>
@@ -10275,7 +10275,7 @@
                 <a:ea typeface="IBM Plex Sans" pitchFamily="34" charset="-122"/>
                 <a:cs typeface="IBM Plex Sans" pitchFamily="34" charset="-120"/>
               </a:rPr>
-              <a:t>Mistake: putting ORDER BY before WHERE, when it always comes last.</a:t>
+              <a:t>Common mistake: putting ORDER BY before WHERE, when it always comes last.</a:t>
             </a:r>
             <a:endParaRPr lang="en-US" sz="1700" dirty="0"/>
           </a:p>
